--- a/manager/training/PM育成方針_2026_2Qプレゼン資料.pptx
+++ b/manager/training/PM育成方針_2026_2Qプレゼン資料.pptx
@@ -13,6 +13,7 @@
     <p:sldId id="261" r:id="rId13"/>
     <p:sldId id="262" r:id="rId14"/>
     <p:sldId id="263" r:id="rId15"/>
+    <p:sldId id="268" r:id="rId20"/>
     <p:sldId id="264" r:id="rId16"/>
     <p:sldId id="265" r:id="rId17"/>
     <p:sldId id="266" r:id="rId18"/>
@@ -4731,7 +4732,7 @@
               </a:defRPr>
             </a:pPr>
             <a:r>
-              <a:t>PM組織開発ハンドブック | PM育成方針 説明資料  ―  10 / 12</a:t>
+              <a:t>PM組織開発ハンドブック | PM育成方針 説明資料  ―  11 / 13</a:t>
             </a:r>
           </a:p>
         </p:txBody>
@@ -5388,7 +5389,7 @@
               </a:defRPr>
             </a:pPr>
             <a:r>
-              <a:t>PM組織開発ハンドブック | PM育成方針 説明資料  ―  11 / 12</a:t>
+              <a:t>PM組織開発ハンドブック | PM育成方針 説明資料  ―  12 / 13</a:t>
             </a:r>
           </a:p>
         </p:txBody>
@@ -6577,17 +6578,9 @@
 </p:sld>
 </file>
 
-<file path=ppt/slides/slide2.xml><?xml version="1.0" encoding="utf-8"?>
+<file path=ppt/slides/slide13.xml><?xml version="1.0" encoding="utf-8"?>
 <p:sld xmlns:a="http://schemas.openxmlformats.org/drawingml/2006/main" xmlns:p="http://schemas.openxmlformats.org/presentationml/2006/main" xmlns:r="http://schemas.openxmlformats.org/officeDocument/2006/relationships">
   <p:cSld>
-    <p:bg>
-      <p:bgPr>
-        <a:solidFill>
-          <a:srgbClr val="F5F7FA"/>
-        </a:solidFill>
-        <a:effectLst/>
-      </p:bgPr>
-    </p:bg>
     <p:spTree>
       <p:nvGrpSpPr>
         <p:cNvPr id="1" name=""/>
@@ -6642,7 +6635,7 @@
               </a:defRPr>
             </a:pPr>
             <a:r>
-              <a:t>1Q(7月〜9月)の振り返りと見えてきた3つの課題</a:t>
+              <a:t>座学の確認テストと追加評価方法</a:t>
             </a:r>
           </a:p>
         </p:txBody>
@@ -6723,7 +6716,1062 @@
               </a:defRPr>
             </a:pPr>
             <a:r>
-              <a:t>PM組織開発ハンドブック | PM育成方針 説明資料  ―  2 / 12</a:t>
+              <a:t>PM組織開発ハンドブック | PM育成方針 説明資料  ―  9 / 13</a:t>
+            </a:r>
+          </a:p>
+        </p:txBody>
+      </p:sp>
+      <p:sp>
+        <p:nvSpPr>
+          <p:cNvPr id="5" name="Rounded Rectangle 4"/>
+          <p:cNvSpPr/>
+          <p:nvPr/>
+        </p:nvSpPr>
+        <p:spPr>
+          <a:xfrm>
+            <a:off x="731520" y="1371600"/>
+            <a:ext cx="4160520" cy="4846320"/>
+          </a:xfrm>
+          <a:prstGeom prst="roundRect">
+            <a:avLst/>
+          </a:prstGeom>
+          <a:solidFill>
+            <a:srgbClr val="FFFFFF"/>
+          </a:solidFill>
+          <a:ln w="19050">
+            <a:solidFill>
+              <a:srgbClr val="C8D2DC"/>
+            </a:solidFill>
+          </a:ln>
+          <a:effectLst/>
+        </p:spPr>
+        <p:style>
+          <a:lnRef idx="1">
+            <a:schemeClr val="accent1"/>
+          </a:lnRef>
+          <a:fillRef idx="3">
+            <a:schemeClr val="accent1"/>
+          </a:fillRef>
+          <a:effectRef idx="2">
+            <a:schemeClr val="accent1"/>
+          </a:effectRef>
+          <a:fontRef idx="minor">
+            <a:schemeClr val="lt1"/>
+          </a:fontRef>
+        </p:style>
+        <p:txBody>
+          <a:bodyPr rtlCol="0" anchor="t" wrap="square" lIns="182880" rIns="182880" tIns="137160"/>
+          <a:lstStyle/>
+          <a:p>
+            <a:pPr algn="ctr">
+              <a:spcAft>
+                <a:spcPts val="800"/>
+              </a:spcAft>
+            </a:pPr>
+            <a:r>
+              <a:rPr sz="1200" b="1">
+                <a:solidFill>
+                  <a:srgbClr val="17365D"/>
+                </a:solidFill>
+                <a:latin typeface="Meiryo UI"/>
+              </a:rPr>
+              <a:t>【 座学ケース・確認テスト 】</a:t>
+            </a:r>
+          </a:p>
+          <a:p>
+            <a:pPr>
+              <a:spcAft>
+                <a:spcPts val="100"/>
+              </a:spcAft>
+            </a:pPr>
+            <a:r>
+              <a:rPr sz="1000" b="1">
+                <a:solidFill>
+                  <a:srgbClr val="2B547E"/>
+                </a:solidFill>
+                <a:latin typeface="Meiryo UI"/>
+              </a:rPr>
+              <a:t>全49能力に1セットずつ用意（新シート）</a:t>
+            </a:r>
+          </a:p>
+          <a:p>
+            <a:pPr>
+              <a:spcAft>
+                <a:spcPts val="600"/>
+              </a:spcAft>
+            </a:pPr>
+            <a:r>
+              <a:rPr sz="900" b="0">
+                <a:solidFill>
+                  <a:srgbClr val="222222"/>
+                </a:solidFill>
+                <a:latin typeface="Meiryo UI"/>
+              </a:rPr>
+              <a:t>ケース課題(40点) ＋ 確認問題2問(30点×2) ＝ 100点。口頭補足質問で根拠を確認。</a:t>
+            </a:r>
+          </a:p>
+          <a:p>
+            <a:pPr>
+              <a:spcAft>
+                <a:spcPts val="100"/>
+              </a:spcAft>
+            </a:pPr>
+            <a:r>
+              <a:rPr sz="1000" b="1">
+                <a:solidFill>
+                  <a:srgbClr val="2B547E"/>
+                </a:solidFill>
+                <a:latin typeface="Meiryo UI"/>
+              </a:rPr>
+              <a:t>合格基準</a:t>
+            </a:r>
+          </a:p>
+          <a:p>
+            <a:pPr>
+              <a:spcAft>
+                <a:spcPts val="600"/>
+              </a:spcAft>
+            </a:pPr>
+            <a:r>
+              <a:rPr sz="900" b="0">
+                <a:solidFill>
+                  <a:srgbClr val="222222"/>
+                </a:solidFill>
+                <a:latin typeface="Meiryo UI"/>
+              </a:rPr>
+              <a:t>80点以上 かつ 判断根拠を口頭で説明できること。不合格は「再受講」で再テスト。</a:t>
+            </a:r>
+          </a:p>
+          <a:p>
+            <a:pPr>
+              <a:spcAft>
+                <a:spcPts val="100"/>
+              </a:spcAft>
+            </a:pPr>
+            <a:r>
+              <a:rPr sz="1000" b="1">
+                <a:solidFill>
+                  <a:srgbClr val="2B547E"/>
+                </a:solidFill>
+                <a:latin typeface="Meiryo UI"/>
+              </a:rPr>
+              <a:t>運用</a:t>
+            </a:r>
+          </a:p>
+          <a:p>
+            <a:pPr>
+              <a:spcAft>
+                <a:spcPts val="600"/>
+              </a:spcAft>
+            </a:pPr>
+            <a:r>
+              <a:rPr sz="900" b="0">
+                <a:solidFill>
+                  <a:srgbClr val="222222"/>
+                </a:solidFill>
+                <a:latin typeface="Meiryo UI"/>
+              </a:rPr>
+              <a:t>得点・合否を各カテゴリシートの座学評価に転記。座学欄のリンクから該当ケースへ移動できます。</a:t>
+            </a:r>
+          </a:p>
+          <a:p>
+            <a:pPr>
+              <a:spcAft>
+                <a:spcPts val="100"/>
+              </a:spcAft>
+            </a:pPr>
+            <a:r>
+              <a:rPr sz="1000" b="1">
+                <a:solidFill>
+                  <a:srgbClr val="2B547E"/>
+                </a:solidFill>
+                <a:latin typeface="Meiryo UI"/>
+              </a:rPr>
+              <a:t>位置づけ</a:t>
+            </a:r>
+          </a:p>
+          <a:p>
+            <a:pPr>
+              <a:spcAft>
+                <a:spcPts val="0"/>
+              </a:spcAft>
+            </a:pPr>
+            <a:r>
+              <a:rPr sz="900" b="0">
+                <a:solidFill>
+                  <a:srgbClr val="222222"/>
+                </a:solidFill>
+                <a:latin typeface="Meiryo UI"/>
+              </a:rPr>
+              <a:t>座学は知識・判断力の確認。実践評価の代替ではなく、OJTの機会が無い能力の事前担保にも使用。</a:t>
+            </a:r>
+          </a:p>
+        </p:txBody>
+      </p:sp>
+      <p:graphicFrame>
+        <p:nvGraphicFramePr>
+          <p:cNvPr id="6" name="Table 5"/>
+          <p:cNvGraphicFramePr>
+            <a:graphicFrameLocks noGrp="1"/>
+          </p:cNvGraphicFramePr>
+          <p:nvPr/>
+        </p:nvGraphicFramePr>
+        <p:xfrm>
+          <a:off x="5120640" y="1371600"/>
+          <a:ext cx="6339535" cy="3474720"/>
+        </p:xfrm>
+        <a:graphic>
+          <a:graphicData uri="http://schemas.openxmlformats.org/drawingml/2006/table">
+            <a:tbl>
+              <a:tblPr firstRow="1" bandRow="1">
+                <a:tableStyleId>{5C22544A-7EE6-4342-B048-85BDC9FD1C3A}</a:tableStyleId>
+              </a:tblPr>
+              <a:tblGrid>
+                <a:gridCol w="3000000"/>
+                <a:gridCol w="2000000"/>
+                <a:gridCol w="1339535"/>
+              </a:tblGrid>
+              <a:tr h="386080">
+                <a:tc>
+                  <a:txBody>
+                    <a:bodyPr/>
+                    <a:lstStyle/>
+                    <a:p>
+                      <a:r>
+                        <a:rPr sz="1000" b="1">
+                          <a:solidFill>
+                            <a:srgbClr val="FFFFFF"/>
+                          </a:solidFill>
+                          <a:latin typeface="Meiryo UI"/>
+                        </a:rPr>
+                        <a:t>追加評価方法</a:t>
+                      </a:r>
+                    </a:p>
+                  </a:txBody>
+                  <a:tcPr anchor="ctr">
+                    <a:solidFill>
+                      <a:srgbClr val="17365D"/>
+                    </a:solidFill>
+                  </a:tcPr>
+                </a:tc>
+                <a:tc>
+                  <a:txBody>
+                    <a:bodyPr/>
+                    <a:lstStyle/>
+                    <a:p>
+                      <a:r>
+                        <a:rPr sz="1000" b="1">
+                          <a:solidFill>
+                            <a:srgbClr val="FFFFFF"/>
+                          </a:solidFill>
+                          <a:latin typeface="Meiryo UI"/>
+                        </a:rPr>
+                        <a:t>主な評価者</a:t>
+                      </a:r>
+                    </a:p>
+                  </a:txBody>
+                  <a:tcPr anchor="ctr">
+                    <a:solidFill>
+                      <a:srgbClr val="17365D"/>
+                    </a:solidFill>
+                  </a:tcPr>
+                </a:tc>
+                <a:tc>
+                  <a:txBody>
+                    <a:bodyPr/>
+                    <a:lstStyle/>
+                    <a:p>
+                      <a:r>
+                        <a:rPr sz="1000" b="1">
+                          <a:solidFill>
+                            <a:srgbClr val="FFFFFF"/>
+                          </a:solidFill>
+                          <a:latin typeface="Meiryo UI"/>
+                        </a:rPr>
+                        <a:t>頻度</a:t>
+                      </a:r>
+                    </a:p>
+                  </a:txBody>
+                  <a:tcPr anchor="ctr">
+                    <a:solidFill>
+                      <a:srgbClr val="17365D"/>
+                    </a:solidFill>
+                  </a:tcPr>
+                </a:tc>
+              </a:tr>
+              <a:tr h="386080">
+                <a:tc>
+                  <a:txBody>
+                    <a:bodyPr/>
+                    <a:lstStyle/>
+                    <a:p>
+                      <a:r>
+                        <a:rPr sz="1000" b="1">
+                          <a:solidFill>
+                            <a:srgbClr val="222222"/>
+                          </a:solidFill>
+                          <a:latin typeface="Meiryo UI"/>
+                        </a:rPr>
+                        <a:t>成果物レビュー</a:t>
+                      </a:r>
+                    </a:p>
+                  </a:txBody>
+                  <a:tcPr anchor="ctr">
+                    <a:solidFill>
+                      <a:srgbClr val="FFFFFF"/>
+                    </a:solidFill>
+                  </a:tcPr>
+                </a:tc>
+                <a:tc>
+                  <a:txBody>
+                    <a:bodyPr/>
+                    <a:lstStyle/>
+                    <a:p>
+                      <a:r>
+                        <a:rPr sz="1000" b="0">
+                          <a:solidFill>
+                            <a:srgbClr val="222222"/>
+                          </a:solidFill>
+                          <a:latin typeface="Meiryo UI"/>
+                        </a:rPr>
+                        <a:t>メンター/PM</a:t>
+                      </a:r>
+                    </a:p>
+                  </a:txBody>
+                  <a:tcPr anchor="ctr">
+                    <a:solidFill>
+                      <a:srgbClr val="FFFFFF"/>
+                    </a:solidFill>
+                  </a:tcPr>
+                </a:tc>
+                <a:tc>
+                  <a:txBody>
+                    <a:bodyPr/>
+                    <a:lstStyle/>
+                    <a:p>
+                      <a:r>
+                        <a:rPr sz="1000" b="0">
+                          <a:solidFill>
+                            <a:srgbClr val="222222"/>
+                          </a:solidFill>
+                          <a:latin typeface="Meiryo UI"/>
+                        </a:rPr>
+                        <a:t>成果物毎</a:t>
+                      </a:r>
+                    </a:p>
+                  </a:txBody>
+                  <a:tcPr anchor="ctr">
+                    <a:solidFill>
+                      <a:srgbClr val="FFFFFF"/>
+                    </a:solidFill>
+                  </a:tcPr>
+                </a:tc>
+              </a:tr>
+              <a:tr h="386080">
+                <a:tc>
+                  <a:txBody>
+                    <a:bodyPr/>
+                    <a:lstStyle/>
+                    <a:p>
+                      <a:r>
+                        <a:rPr sz="1000" b="1">
+                          <a:solidFill>
+                            <a:srgbClr val="222222"/>
+                          </a:solidFill>
+                          <a:latin typeface="Meiryo UI"/>
+                        </a:rPr>
+                        <a:t>口頭試問・面談</a:t>
+                      </a:r>
+                    </a:p>
+                  </a:txBody>
+                  <a:tcPr anchor="ctr">
+                    <a:solidFill>
+                      <a:srgbClr val="F4F7FA"/>
+                    </a:solidFill>
+                  </a:tcPr>
+                </a:tc>
+                <a:tc>
+                  <a:txBody>
+                    <a:bodyPr/>
+                    <a:lstStyle/>
+                    <a:p>
+                      <a:r>
+                        <a:rPr sz="1000" b="0">
+                          <a:solidFill>
+                            <a:srgbClr val="222222"/>
+                          </a:solidFill>
+                          <a:latin typeface="Meiryo UI"/>
+                        </a:rPr>
+                        <a:t>メンター</a:t>
+                      </a:r>
+                    </a:p>
+                  </a:txBody>
+                  <a:tcPr anchor="ctr">
+                    <a:solidFill>
+                      <a:srgbClr val="F4F7FA"/>
+                    </a:solidFill>
+                  </a:tcPr>
+                </a:tc>
+                <a:tc>
+                  <a:txBody>
+                    <a:bodyPr/>
+                    <a:lstStyle/>
+                    <a:p>
+                      <a:r>
+                        <a:rPr sz="1000" b="0">
+                          <a:solidFill>
+                            <a:srgbClr val="222222"/>
+                          </a:solidFill>
+                          <a:latin typeface="Meiryo UI"/>
+                        </a:rPr>
+                        <a:t>月次</a:t>
+                      </a:r>
+                    </a:p>
+                  </a:txBody>
+                  <a:tcPr anchor="ctr">
+                    <a:solidFill>
+                      <a:srgbClr val="F4F7FA"/>
+                    </a:solidFill>
+                  </a:tcPr>
+                </a:tc>
+              </a:tr>
+              <a:tr h="386080">
+                <a:tc>
+                  <a:txBody>
+                    <a:bodyPr/>
+                    <a:lstStyle/>
+                    <a:p>
+                      <a:r>
+                        <a:rPr sz="1000" b="1">
+                          <a:solidFill>
+                            <a:srgbClr val="222222"/>
+                          </a:solidFill>
+                          <a:latin typeface="Meiryo UI"/>
+                        </a:rPr>
+                        <a:t>360度評価</a:t>
+                      </a:r>
+                    </a:p>
+                  </a:txBody>
+                  <a:tcPr anchor="ctr">
+                    <a:solidFill>
+                      <a:srgbClr val="FFFFFF"/>
+                    </a:solidFill>
+                  </a:tcPr>
+                </a:tc>
+                <a:tc>
+                  <a:txBody>
+                    <a:bodyPr/>
+                    <a:lstStyle/>
+                    <a:p>
+                      <a:r>
+                        <a:rPr sz="1000" b="0">
+                          <a:solidFill>
+                            <a:srgbClr val="222222"/>
+                          </a:solidFill>
+                          <a:latin typeface="Meiryo UI"/>
+                        </a:rPr>
+                        <a:t>上司・同僚・顧客</a:t>
+                      </a:r>
+                    </a:p>
+                  </a:txBody>
+                  <a:tcPr anchor="ctr">
+                    <a:solidFill>
+                      <a:srgbClr val="FFFFFF"/>
+                    </a:solidFill>
+                  </a:tcPr>
+                </a:tc>
+                <a:tc>
+                  <a:txBody>
+                    <a:bodyPr/>
+                    <a:lstStyle/>
+                    <a:p>
+                      <a:r>
+                        <a:rPr sz="1000" b="0">
+                          <a:solidFill>
+                            <a:srgbClr val="222222"/>
+                          </a:solidFill>
+                          <a:latin typeface="Meiryo UI"/>
+                        </a:rPr>
+                        <a:t>四半期</a:t>
+                      </a:r>
+                    </a:p>
+                  </a:txBody>
+                  <a:tcPr anchor="ctr">
+                    <a:solidFill>
+                      <a:srgbClr val="FFFFFF"/>
+                    </a:solidFill>
+                  </a:tcPr>
+                </a:tc>
+              </a:tr>
+              <a:tr h="386080">
+                <a:tc>
+                  <a:txBody>
+                    <a:bodyPr/>
+                    <a:lstStyle/>
+                    <a:p>
+                      <a:r>
+                        <a:rPr sz="1000" b="1">
+                          <a:solidFill>
+                            <a:srgbClr val="222222"/>
+                          </a:solidFill>
+                          <a:latin typeface="Meiryo UI"/>
+                        </a:rPr>
+                        <a:t>ロールプレイ・シミュレーション</a:t>
+                      </a:r>
+                    </a:p>
+                  </a:txBody>
+                  <a:tcPr anchor="ctr">
+                    <a:solidFill>
+                      <a:srgbClr val="F4F7FA"/>
+                    </a:solidFill>
+                  </a:tcPr>
+                </a:tc>
+                <a:tc>
+                  <a:txBody>
+                    <a:bodyPr/>
+                    <a:lstStyle/>
+                    <a:p>
+                      <a:r>
+                        <a:rPr sz="1000" b="0">
+                          <a:solidFill>
+                            <a:srgbClr val="222222"/>
+                          </a:solidFill>
+                          <a:latin typeface="Meiryo UI"/>
+                        </a:rPr>
+                        <a:t>メンター</a:t>
+                      </a:r>
+                    </a:p>
+                  </a:txBody>
+                  <a:tcPr anchor="ctr">
+                    <a:solidFill>
+                      <a:srgbClr val="F4F7FA"/>
+                    </a:solidFill>
+                  </a:tcPr>
+                </a:tc>
+                <a:tc>
+                  <a:txBody>
+                    <a:bodyPr/>
+                    <a:lstStyle/>
+                    <a:p>
+                      <a:r>
+                        <a:rPr sz="1000" b="0">
+                          <a:solidFill>
+                            <a:srgbClr val="222222"/>
+                          </a:solidFill>
+                          <a:latin typeface="Meiryo UI"/>
+                        </a:rPr>
+                        <a:t>四半期</a:t>
+                      </a:r>
+                    </a:p>
+                  </a:txBody>
+                  <a:tcPr anchor="ctr">
+                    <a:solidFill>
+                      <a:srgbClr val="F4F7FA"/>
+                    </a:solidFill>
+                  </a:tcPr>
+                </a:tc>
+              </a:tr>
+              <a:tr h="386080">
+                <a:tc>
+                  <a:txBody>
+                    <a:bodyPr/>
+                    <a:lstStyle/>
+                    <a:p>
+                      <a:r>
+                        <a:rPr sz="1000" b="1">
+                          <a:solidFill>
+                            <a:srgbClr val="222222"/>
+                          </a:solidFill>
+                          <a:latin typeface="Meiryo UI"/>
+                        </a:rPr>
+                        <a:t>事例発表・振り返り会</a:t>
+                      </a:r>
+                    </a:p>
+                  </a:txBody>
+                  <a:tcPr anchor="ctr">
+                    <a:solidFill>
+                      <a:srgbClr val="FFFFFF"/>
+                    </a:solidFill>
+                  </a:tcPr>
+                </a:tc>
+                <a:tc>
+                  <a:txBody>
+                    <a:bodyPr/>
+                    <a:lstStyle/>
+                    <a:p>
+                      <a:r>
+                        <a:rPr sz="1000" b="0">
+                          <a:solidFill>
+                            <a:srgbClr val="222222"/>
+                          </a:solidFill>
+                          <a:latin typeface="Meiryo UI"/>
+                        </a:rPr>
+                        <a:t>PM組織全体</a:t>
+                      </a:r>
+                    </a:p>
+                  </a:txBody>
+                  <a:tcPr anchor="ctr">
+                    <a:solidFill>
+                      <a:srgbClr val="FFFFFF"/>
+                    </a:solidFill>
+                  </a:tcPr>
+                </a:tc>
+                <a:tc>
+                  <a:txBody>
+                    <a:bodyPr/>
+                    <a:lstStyle/>
+                    <a:p>
+                      <a:r>
+                        <a:rPr sz="1000" b="0">
+                          <a:solidFill>
+                            <a:srgbClr val="222222"/>
+                          </a:solidFill>
+                          <a:latin typeface="Meiryo UI"/>
+                        </a:rPr>
+                        <a:t>四半期</a:t>
+                      </a:r>
+                    </a:p>
+                  </a:txBody>
+                  <a:tcPr anchor="ctr">
+                    <a:solidFill>
+                      <a:srgbClr val="FFFFFF"/>
+                    </a:solidFill>
+                  </a:tcPr>
+                </a:tc>
+              </a:tr>
+              <a:tr h="386080">
+                <a:tc>
+                  <a:txBody>
+                    <a:bodyPr/>
+                    <a:lstStyle/>
+                    <a:p>
+                      <a:r>
+                        <a:rPr sz="1000" b="1">
+                          <a:solidFill>
+                            <a:srgbClr val="222222"/>
+                          </a:solidFill>
+                          <a:latin typeface="Meiryo UI"/>
+                        </a:rPr>
+                        <a:t>自己評価ギャップ分析</a:t>
+                      </a:r>
+                    </a:p>
+                  </a:txBody>
+                  <a:tcPr anchor="ctr">
+                    <a:solidFill>
+                      <a:srgbClr val="F4F7FA"/>
+                    </a:solidFill>
+                  </a:tcPr>
+                </a:tc>
+                <a:tc>
+                  <a:txBody>
+                    <a:bodyPr/>
+                    <a:lstStyle/>
+                    <a:p>
+                      <a:r>
+                        <a:rPr sz="1000" b="0">
+                          <a:solidFill>
+                            <a:srgbClr val="222222"/>
+                          </a:solidFill>
+                          <a:latin typeface="Meiryo UI"/>
+                        </a:rPr>
+                        <a:t>本人＋メンター</a:t>
+                      </a:r>
+                    </a:p>
+                  </a:txBody>
+                  <a:tcPr anchor="ctr">
+                    <a:solidFill>
+                      <a:srgbClr val="F4F7FA"/>
+                    </a:solidFill>
+                  </a:tcPr>
+                </a:tc>
+                <a:tc>
+                  <a:txBody>
+                    <a:bodyPr/>
+                    <a:lstStyle/>
+                    <a:p>
+                      <a:r>
+                        <a:rPr sz="1000" b="0">
+                          <a:solidFill>
+                            <a:srgbClr val="222222"/>
+                          </a:solidFill>
+                          <a:latin typeface="Meiryo UI"/>
+                        </a:rPr>
+                        <a:t>月次</a:t>
+                      </a:r>
+                    </a:p>
+                  </a:txBody>
+                  <a:tcPr anchor="ctr">
+                    <a:solidFill>
+                      <a:srgbClr val="F4F7FA"/>
+                    </a:solidFill>
+                  </a:tcPr>
+                </a:tc>
+              </a:tr>
+              <a:tr h="386080">
+                <a:tc>
+                  <a:txBody>
+                    <a:bodyPr/>
+                    <a:lstStyle/>
+                    <a:p>
+                      <a:r>
+                        <a:rPr sz="1000" b="1">
+                          <a:solidFill>
+                            <a:srgbClr val="222222"/>
+                          </a:solidFill>
+                          <a:latin typeface="Meiryo UI"/>
+                        </a:rPr>
+                        <a:t>ポートフォリオ評価</a:t>
+                      </a:r>
+                    </a:p>
+                  </a:txBody>
+                  <a:tcPr anchor="ctr">
+                    <a:solidFill>
+                      <a:srgbClr val="FFFFFF"/>
+                    </a:solidFill>
+                  </a:tcPr>
+                </a:tc>
+                <a:tc>
+                  <a:txBody>
+                    <a:bodyPr/>
+                    <a:lstStyle/>
+                    <a:p>
+                      <a:r>
+                        <a:rPr sz="1000" b="0">
+                          <a:solidFill>
+                            <a:srgbClr val="222222"/>
+                          </a:solidFill>
+                          <a:latin typeface="Meiryo UI"/>
+                        </a:rPr>
+                        <a:t>評価委員</a:t>
+                      </a:r>
+                    </a:p>
+                  </a:txBody>
+                  <a:tcPr anchor="ctr">
+                    <a:solidFill>
+                      <a:srgbClr val="FFFFFF"/>
+                    </a:solidFill>
+                  </a:tcPr>
+                </a:tc>
+                <a:tc>
+                  <a:txBody>
+                    <a:bodyPr/>
+                    <a:lstStyle/>
+                    <a:p>
+                      <a:r>
+                        <a:rPr sz="1000" b="0">
+                          <a:solidFill>
+                            <a:srgbClr val="222222"/>
+                          </a:solidFill>
+                          <a:latin typeface="Meiryo UI"/>
+                        </a:rPr>
+                        <a:t>四半期末</a:t>
+                      </a:r>
+                    </a:p>
+                  </a:txBody>
+                  <a:tcPr anchor="ctr">
+                    <a:solidFill>
+                      <a:srgbClr val="FFFFFF"/>
+                    </a:solidFill>
+                  </a:tcPr>
+                </a:tc>
+              </a:tr>
+              <a:tr h="386080">
+                <a:tc>
+                  <a:txBody>
+                    <a:bodyPr/>
+                    <a:lstStyle/>
+                    <a:p>
+                      <a:r>
+                        <a:rPr sz="1000" b="1">
+                          <a:solidFill>
+                            <a:srgbClr val="222222"/>
+                          </a:solidFill>
+                          <a:latin typeface="Meiryo UI"/>
+                        </a:rPr>
+                        <a:t>プロジェクトKPI連動評価</a:t>
+                      </a:r>
+                    </a:p>
+                  </a:txBody>
+                  <a:tcPr anchor="ctr">
+                    <a:solidFill>
+                      <a:srgbClr val="F4F7FA"/>
+                    </a:solidFill>
+                  </a:tcPr>
+                </a:tc>
+                <a:tc>
+                  <a:txBody>
+                    <a:bodyPr/>
+                    <a:lstStyle/>
+                    <a:p>
+                      <a:r>
+                        <a:rPr sz="1000" b="0">
+                          <a:solidFill>
+                            <a:srgbClr val="222222"/>
+                          </a:solidFill>
+                          <a:latin typeface="Meiryo UI"/>
+                        </a:rPr>
+                        <a:t>PM/PMO</a:t>
+                      </a:r>
+                    </a:p>
+                  </a:txBody>
+                  <a:tcPr anchor="ctr">
+                    <a:solidFill>
+                      <a:srgbClr val="F4F7FA"/>
+                    </a:solidFill>
+                  </a:tcPr>
+                </a:tc>
+                <a:tc>
+                  <a:txBody>
+                    <a:bodyPr/>
+                    <a:lstStyle/>
+                    <a:p>
+                      <a:r>
+                        <a:rPr sz="1000" b="0">
+                          <a:solidFill>
+                            <a:srgbClr val="222222"/>
+                          </a:solidFill>
+                          <a:latin typeface="Meiryo UI"/>
+                        </a:rPr>
+                        <a:t>月次</a:t>
+                      </a:r>
+                    </a:p>
+                  </a:txBody>
+                  <a:tcPr anchor="ctr">
+                    <a:solidFill>
+                      <a:srgbClr val="F4F7FA"/>
+                    </a:solidFill>
+                  </a:tcPr>
+                </a:tc>
+              </a:tr>
+            </a:tbl>
+          </a:graphicData>
+        </a:graphic>
+      </p:graphicFrame>
+      <p:sp>
+        <p:nvSpPr>
+          <p:cNvPr id="7" name="Rounded Rectangle 6"/>
+          <p:cNvSpPr/>
+          <p:nvPr/>
+        </p:nvSpPr>
+        <p:spPr>
+          <a:xfrm>
+            <a:off x="5120640" y="4983480"/>
+            <a:ext cx="6339535" cy="1234440"/>
+          </a:xfrm>
+          <a:prstGeom prst="roundRect">
+            <a:avLst/>
+          </a:prstGeom>
+          <a:solidFill>
+            <a:srgbClr val="EAF1F8"/>
+          </a:solidFill>
+          <a:ln w="12700">
+            <a:solidFill>
+              <a:srgbClr val="2B547E"/>
+            </a:solidFill>
+          </a:ln>
+          <a:effectLst/>
+        </p:spPr>
+        <p:style>
+          <a:lnRef idx="1">
+            <a:schemeClr val="accent1"/>
+          </a:lnRef>
+          <a:fillRef idx="3">
+            <a:schemeClr val="accent1"/>
+          </a:fillRef>
+          <a:effectRef idx="2">
+            <a:schemeClr val="accent1"/>
+          </a:effectRef>
+          <a:fontRef idx="minor">
+            <a:schemeClr val="lt1"/>
+          </a:fontRef>
+        </p:style>
+        <p:txBody>
+          <a:bodyPr rtlCol="0" anchor="ctr" wrap="square" lIns="137160" rIns="137160"/>
+          <a:lstStyle/>
+          <a:p>
+            <a:pPr algn="ctr">
+              <a:spcAft>
+                <a:spcPts val="300"/>
+              </a:spcAft>
+            </a:pPr>
+            <a:r>
+              <a:rPr sz="1000" b="1">
+                <a:solidFill>
+                  <a:srgbClr val="17365D"/>
+                </a:solidFill>
+                <a:latin typeface="Meiryo UI"/>
+              </a:rPr>
+              <a:t>自走判定への使い方</a:t>
+            </a:r>
+          </a:p>
+          <a:p>
+            <a:r>
+              <a:rPr sz="900" b="0">
+                <a:solidFill>
+                  <a:srgbClr val="222222"/>
+                </a:solidFill>
+                <a:latin typeface="Meiryo UI"/>
+              </a:rPr>
+              <a:t>実践評価に加え、追加評価方法のうち2つ以上で基準を満たし、直近2回は支援なしで遂行できていることを「自走」と判定。カテゴリ毎の推奨3方法は「追加評価方法」シート参照。</a:t>
+            </a:r>
+          </a:p>
+        </p:txBody>
+      </p:sp>
+    </p:spTree>
+  </p:cSld>
+  <p:clrMapOvr>
+    <a:masterClrMapping/>
+  </p:clrMapOvr>
+</p:sld>
+</file>
+
+<file path=ppt/slides/slide2.xml><?xml version="1.0" encoding="utf-8"?>
+<p:sld xmlns:a="http://schemas.openxmlformats.org/drawingml/2006/main" xmlns:p="http://schemas.openxmlformats.org/presentationml/2006/main" xmlns:r="http://schemas.openxmlformats.org/officeDocument/2006/relationships">
+  <p:cSld>
+    <p:bg>
+      <p:bgPr>
+        <a:solidFill>
+          <a:srgbClr val="F5F7FA"/>
+        </a:solidFill>
+        <a:effectLst/>
+      </p:bgPr>
+    </p:bg>
+    <p:spTree>
+      <p:nvGrpSpPr>
+        <p:cNvPr id="1" name=""/>
+        <p:cNvGrpSpPr/>
+        <p:nvPr/>
+      </p:nvGrpSpPr>
+      <p:grpSpPr/>
+      <p:sp>
+        <p:nvSpPr>
+          <p:cNvPr id="2" name="TextBox 1"/>
+          <p:cNvSpPr txBox="1"/>
+          <p:nvPr/>
+        </p:nvSpPr>
+        <p:spPr>
+          <a:xfrm>
+            <a:off x="731520" y="365760"/>
+            <a:ext cx="10728655" cy="1005840"/>
+          </a:xfrm>
+          <a:prstGeom prst="rect">
+            <a:avLst/>
+          </a:prstGeom>
+          <a:noFill/>
+        </p:spPr>
+        <p:txBody>
+          <a:bodyPr wrap="square" lIns="0" tIns="0" rIns="0" bIns="0">
+            <a:spAutoFit/>
+          </a:bodyPr>
+          <a:lstStyle/>
+          <a:p>
+            <a:pPr>
+              <a:spcAft>
+                <a:spcPts val="200"/>
+              </a:spcAft>
+              <a:defRPr sz="1200" b="1">
+                <a:solidFill>
+                  <a:srgbClr val="2B547E"/>
+                </a:solidFill>
+                <a:latin typeface="Meiryo UI"/>
+              </a:defRPr>
+            </a:pPr>
+            <a:r>
+              <a:t>2026年度 2Q以降 PM育成方針</a:t>
+            </a:r>
+          </a:p>
+          <a:p>
+            <a:pPr>
+              <a:defRPr sz="2200" b="1">
+                <a:solidFill>
+                  <a:srgbClr val="17365D"/>
+                </a:solidFill>
+                <a:latin typeface="Meiryo UI"/>
+              </a:defRPr>
+            </a:pPr>
+            <a:r>
+              <a:t>1Q(7月〜9月)の振り返りと見えてきた3つの課題</a:t>
+            </a:r>
+          </a:p>
+        </p:txBody>
+      </p:sp>
+      <p:sp>
+        <p:nvSpPr>
+          <p:cNvPr id="3" name="Rectangle 2"/>
+          <p:cNvSpPr/>
+          <p:nvPr/>
+        </p:nvSpPr>
+        <p:spPr>
+          <a:xfrm>
+            <a:off x="731520" y="6400800"/>
+            <a:ext cx="10728655" cy="18288"/>
+          </a:xfrm>
+          <a:prstGeom prst="rect">
+            <a:avLst/>
+          </a:prstGeom>
+          <a:solidFill>
+            <a:srgbClr val="C8D2DC"/>
+          </a:solidFill>
+          <a:ln>
+            <a:solidFill>
+              <a:srgbClr val="C8D2DC"/>
+            </a:solidFill>
+          </a:ln>
+        </p:spPr>
+        <p:style>
+          <a:lnRef idx="1">
+            <a:schemeClr val="accent1"/>
+          </a:lnRef>
+          <a:fillRef idx="3">
+            <a:schemeClr val="accent1"/>
+          </a:fillRef>
+          <a:effectRef idx="2">
+            <a:schemeClr val="accent1"/>
+          </a:effectRef>
+          <a:fontRef idx="minor">
+            <a:schemeClr val="lt1"/>
+          </a:fontRef>
+        </p:style>
+        <p:txBody>
+          <a:bodyPr rtlCol="0" anchor="ctr"/>
+          <a:lstStyle/>
+          <a:p>
+            <a:pPr algn="ctr"/>
+          </a:p>
+        </p:txBody>
+      </p:sp>
+      <p:sp>
+        <p:nvSpPr>
+          <p:cNvPr id="4" name="TextBox 3"/>
+          <p:cNvSpPr txBox="1"/>
+          <p:nvPr/>
+        </p:nvSpPr>
+        <p:spPr>
+          <a:xfrm>
+            <a:off x="731520" y="6446520"/>
+            <a:ext cx="10728655" cy="320040"/>
+          </a:xfrm>
+          <a:prstGeom prst="rect">
+            <a:avLst/>
+          </a:prstGeom>
+          <a:noFill/>
+        </p:spPr>
+        <p:txBody>
+          <a:bodyPr wrap="square" lIns="0" tIns="0" rIns="0" bIns="0">
+            <a:spAutoFit/>
+          </a:bodyPr>
+          <a:lstStyle/>
+          <a:p>
+            <a:pPr>
+              <a:defRPr sz="900">
+                <a:solidFill>
+                  <a:srgbClr val="646464"/>
+                </a:solidFill>
+                <a:latin typeface="Meiryo UI"/>
+              </a:defRPr>
+            </a:pPr>
+            <a:r>
+              <a:t>PM組織開発ハンドブック | PM育成方針 説明資料  ―  2 / 13</a:t>
             </a:r>
           </a:p>
         </p:txBody>
@@ -7325,7 +8373,7 @@
               </a:defRPr>
             </a:pPr>
             <a:r>
-              <a:t>PM組織開発ハンドブック | PM育成方針 説明資料  ―  3 / 12</a:t>
+              <a:t>PM組織開発ハンドブック | PM育成方針 説明資料  ―  3 / 13</a:t>
             </a:r>
           </a:p>
         </p:txBody>
@@ -7939,7 +8987,7 @@
               </a:defRPr>
             </a:pPr>
             <a:r>
-              <a:t>PM組織開発ハンドブック | PM育成方針 説明資料  ―  4 / 12</a:t>
+              <a:t>PM組織開発ハンドブック | PM育成方針 説明資料  ―  4 / 13</a:t>
             </a:r>
           </a:p>
         </p:txBody>
@@ -8913,7 +9961,7 @@
               </a:defRPr>
             </a:pPr>
             <a:r>
-              <a:t>PM組織開発ハンドブック | PM育成方針 説明資料  ―  5 / 12</a:t>
+              <a:t>PM組織開発ハンドブック | PM育成方針 説明資料  ―  5 / 13</a:t>
             </a:r>
           </a:p>
         </p:txBody>
@@ -9510,7 +10558,7 @@
               </a:defRPr>
             </a:pPr>
             <a:r>
-              <a:t>PM組織開発ハンドブック | PM育成方針 説明資料  ―  6 / 12</a:t>
+              <a:t>PM組織開発ハンドブック | PM育成方針 説明資料  ―  6 / 13</a:t>
             </a:r>
           </a:p>
         </p:txBody>
@@ -10366,7 +11414,7 @@
               </a:defRPr>
             </a:pPr>
             <a:r>
-              <a:t>PM組織開発ハンドブック | PM育成方針 説明資料  ―  7 / 12</a:t>
+              <a:t>PM組織開発ハンドブック | PM育成方針 説明資料  ―  7 / 13</a:t>
             </a:r>
           </a:p>
         </p:txBody>
@@ -10726,7 +11774,7 @@
               </a:defRPr>
             </a:pPr>
             <a:r>
-              <a:t>PM組織開発ハンドブック | PM育成方針 説明資料  ―  8 / 12</a:t>
+              <a:t>PM組織開発ハンドブック | PM育成方針 説明資料  ―  8 / 13</a:t>
             </a:r>
           </a:p>
         </p:txBody>
@@ -11542,7 +12590,7 @@
               </a:defRPr>
             </a:pPr>
             <a:r>
-              <a:t>PM組織開発ハンドブック | PM育成方針 説明資料  ―  9 / 12</a:t>
+              <a:t>PM組織開発ハンドブック | PM育成方針 説明資料  ―  10 / 13</a:t>
             </a:r>
           </a:p>
         </p:txBody>
